--- a/apps/md-backend/src/main/resources/templates/master_templates_4j.pptx
+++ b/apps/md-backend/src/main/resources/templates/master_templates_4j.pptx
@@ -265,7 +265,7 @@
           <a:p>
             <a:fld id="{45F062A3-8868-478A-95F9-B75BA86CF6E5}" type="datetimeFigureOut">
               <a:rPr lang="es-PE" smtClean="0"/>
-              <a:t>5/09/2026</a:t>
+              <a:t>11/09/2026</a:t>
             </a:fld>
             <a:endParaRPr lang="es-PE"/>
           </a:p>
@@ -465,7 +465,7 @@
           <a:p>
             <a:fld id="{45F062A3-8868-478A-95F9-B75BA86CF6E5}" type="datetimeFigureOut">
               <a:rPr lang="es-PE" smtClean="0"/>
-              <a:t>5/09/2026</a:t>
+              <a:t>11/09/2026</a:t>
             </a:fld>
             <a:endParaRPr lang="es-PE"/>
           </a:p>
@@ -675,7 +675,7 @@
           <a:p>
             <a:fld id="{45F062A3-8868-478A-95F9-B75BA86CF6E5}" type="datetimeFigureOut">
               <a:rPr lang="es-PE" smtClean="0"/>
-              <a:t>5/09/2026</a:t>
+              <a:t>11/09/2026</a:t>
             </a:fld>
             <a:endParaRPr lang="es-PE"/>
           </a:p>
@@ -875,7 +875,7 @@
           <a:p>
             <a:fld id="{45F062A3-8868-478A-95F9-B75BA86CF6E5}" type="datetimeFigureOut">
               <a:rPr lang="es-PE" smtClean="0"/>
-              <a:t>5/09/2026</a:t>
+              <a:t>11/09/2026</a:t>
             </a:fld>
             <a:endParaRPr lang="es-PE"/>
           </a:p>
@@ -1151,7 +1151,7 @@
           <a:p>
             <a:fld id="{45F062A3-8868-478A-95F9-B75BA86CF6E5}" type="datetimeFigureOut">
               <a:rPr lang="es-PE" smtClean="0"/>
-              <a:t>5/09/2026</a:t>
+              <a:t>11/09/2026</a:t>
             </a:fld>
             <a:endParaRPr lang="es-PE"/>
           </a:p>
@@ -1419,7 +1419,7 @@
           <a:p>
             <a:fld id="{45F062A3-8868-478A-95F9-B75BA86CF6E5}" type="datetimeFigureOut">
               <a:rPr lang="es-PE" smtClean="0"/>
-              <a:t>5/09/2026</a:t>
+              <a:t>11/09/2026</a:t>
             </a:fld>
             <a:endParaRPr lang="es-PE"/>
           </a:p>
@@ -1834,7 +1834,7 @@
           <a:p>
             <a:fld id="{45F062A3-8868-478A-95F9-B75BA86CF6E5}" type="datetimeFigureOut">
               <a:rPr lang="es-PE" smtClean="0"/>
-              <a:t>5/09/2026</a:t>
+              <a:t>11/09/2026</a:t>
             </a:fld>
             <a:endParaRPr lang="es-PE"/>
           </a:p>
@@ -1976,7 +1976,7 @@
           <a:p>
             <a:fld id="{45F062A3-8868-478A-95F9-B75BA86CF6E5}" type="datetimeFigureOut">
               <a:rPr lang="es-PE" smtClean="0"/>
-              <a:t>5/09/2026</a:t>
+              <a:t>11/09/2026</a:t>
             </a:fld>
             <a:endParaRPr lang="es-PE"/>
           </a:p>
@@ -2089,7 +2089,7 @@
           <a:p>
             <a:fld id="{45F062A3-8868-478A-95F9-B75BA86CF6E5}" type="datetimeFigureOut">
               <a:rPr lang="es-PE" smtClean="0"/>
-              <a:t>5/09/2026</a:t>
+              <a:t>11/09/2026</a:t>
             </a:fld>
             <a:endParaRPr lang="es-PE"/>
           </a:p>
@@ -2402,7 +2402,7 @@
           <a:p>
             <a:fld id="{45F062A3-8868-478A-95F9-B75BA86CF6E5}" type="datetimeFigureOut">
               <a:rPr lang="es-PE" smtClean="0"/>
-              <a:t>5/09/2026</a:t>
+              <a:t>11/09/2026</a:t>
             </a:fld>
             <a:endParaRPr lang="es-PE"/>
           </a:p>
@@ -2691,7 +2691,7 @@
           <a:p>
             <a:fld id="{45F062A3-8868-478A-95F9-B75BA86CF6E5}" type="datetimeFigureOut">
               <a:rPr lang="es-PE" smtClean="0"/>
-              <a:t>5/09/2026</a:t>
+              <a:t>11/09/2026</a:t>
             </a:fld>
             <a:endParaRPr lang="es-PE"/>
           </a:p>
@@ -2934,7 +2934,7 @@
           <a:p>
             <a:fld id="{45F062A3-8868-478A-95F9-B75BA86CF6E5}" type="datetimeFigureOut">
               <a:rPr lang="es-PE" smtClean="0"/>
-              <a:t>5/09/2026</a:t>
+              <a:t>11/09/2026</a:t>
             </a:fld>
             <a:endParaRPr lang="es-PE"/>
           </a:p>
@@ -3417,7 +3417,11 @@
           <a:lstStyle/>
           <a:p>
             <a:pPr algn="ctr"/>
-            <a:endParaRPr lang="es-PE"/>
+            <a:endParaRPr lang="es-PE">
+              <a:latin typeface="Calibri" panose="020F0502020204030204" pitchFamily="34" charset="0"/>
+              <a:ea typeface="Calibri" panose="020F0502020204030204" pitchFamily="34" charset="0"/>
+              <a:cs typeface="Calibri" panose="020F0502020204030204" pitchFamily="34" charset="0"/>
+            </a:endParaRPr>
           </a:p>
         </p:txBody>
       </p:sp>
@@ -3474,15 +3478,27 @@
           <a:p>
             <a:pPr algn="ctr"/>
             <a:r>
-              <a:rPr lang="es-PE" sz="3600" b="1" dirty="0"/>
+              <a:rPr lang="es-PE" sz="3600" b="1" dirty="0">
+                <a:latin typeface="Calibri" panose="020F0502020204030204" pitchFamily="34" charset="0"/>
+                <a:ea typeface="Calibri" panose="020F0502020204030204" pitchFamily="34" charset="0"/>
+                <a:cs typeface="Calibri" panose="020F0502020204030204" pitchFamily="34" charset="0"/>
+              </a:rPr>
               <a:t>{</a:t>
             </a:r>
             <a:r>
-              <a:rPr lang="es-PE" sz="3600" b="1" dirty="0" err="1"/>
+              <a:rPr lang="es-PE" sz="3600" b="1" dirty="0" err="1">
+                <a:latin typeface="Calibri" panose="020F0502020204030204" pitchFamily="34" charset="0"/>
+                <a:ea typeface="Calibri" panose="020F0502020204030204" pitchFamily="34" charset="0"/>
+                <a:cs typeface="Calibri" panose="020F0502020204030204" pitchFamily="34" charset="0"/>
+              </a:rPr>
               <a:t>name</a:t>
             </a:r>
             <a:r>
-              <a:rPr lang="es-PE" sz="3600" b="1" dirty="0"/>
+              <a:rPr lang="es-PE" sz="3600" b="1" dirty="0">
+                <a:latin typeface="Calibri" panose="020F0502020204030204" pitchFamily="34" charset="0"/>
+                <a:ea typeface="Calibri" panose="020F0502020204030204" pitchFamily="34" charset="0"/>
+                <a:cs typeface="Calibri" panose="020F0502020204030204" pitchFamily="34" charset="0"/>
+              </a:rPr>
               <a:t>}</a:t>
             </a:r>
           </a:p>
@@ -3541,15 +3557,27 @@
           <a:p>
             <a:pPr algn="ctr"/>
             <a:r>
-              <a:rPr lang="es-PE" sz="3600" b="1" dirty="0"/>
+              <a:rPr lang="es-PE" sz="3600" b="1" dirty="0">
+                <a:latin typeface="Calibri" panose="020F0502020204030204" pitchFamily="34" charset="0"/>
+                <a:ea typeface="Calibri" panose="020F0502020204030204" pitchFamily="34" charset="0"/>
+                <a:cs typeface="Calibri" panose="020F0502020204030204" pitchFamily="34" charset="0"/>
+              </a:rPr>
               <a:t>{</a:t>
             </a:r>
             <a:r>
-              <a:rPr lang="es-PE" sz="3600" b="1" dirty="0" err="1"/>
+              <a:rPr lang="es-PE" sz="3600" b="1" dirty="0" err="1">
+                <a:latin typeface="Calibri" panose="020F0502020204030204" pitchFamily="34" charset="0"/>
+                <a:ea typeface="Calibri" panose="020F0502020204030204" pitchFamily="34" charset="0"/>
+                <a:cs typeface="Calibri" panose="020F0502020204030204" pitchFamily="34" charset="0"/>
+              </a:rPr>
               <a:t>avg</a:t>
             </a:r>
             <a:r>
-              <a:rPr lang="es-PE" sz="3600" b="1" dirty="0"/>
+              <a:rPr lang="es-PE" sz="3600" b="1" dirty="0">
+                <a:latin typeface="Calibri" panose="020F0502020204030204" pitchFamily="34" charset="0"/>
+                <a:ea typeface="Calibri" panose="020F0502020204030204" pitchFamily="34" charset="0"/>
+                <a:cs typeface="Calibri" panose="020F0502020204030204" pitchFamily="34" charset="0"/>
+              </a:rPr>
               <a:t>}</a:t>
             </a:r>
           </a:p>
@@ -3607,7 +3635,11 @@
           <a:lstStyle/>
           <a:p>
             <a:pPr algn="ctr"/>
-            <a:endParaRPr lang="es-PE" sz="3600" b="1" dirty="0"/>
+            <a:endParaRPr lang="es-PE" sz="3600" b="1" dirty="0">
+              <a:latin typeface="Calibri" panose="020F0502020204030204" pitchFamily="34" charset="0"/>
+              <a:ea typeface="Calibri" panose="020F0502020204030204" pitchFamily="34" charset="0"/>
+              <a:cs typeface="Calibri" panose="020F0502020204030204" pitchFamily="34" charset="0"/>
+            </a:endParaRPr>
           </a:p>
         </p:txBody>
       </p:sp>
@@ -3664,7 +3696,11 @@
           <a:p>
             <a:pPr algn="ctr"/>
             <a:r>
-              <a:rPr lang="es-PE" sz="2000" b="1" dirty="0"/>
+              <a:rPr lang="es-PE" sz="2000" b="1" dirty="0">
+                <a:latin typeface="Calibri" panose="020F0502020204030204" pitchFamily="34" charset="0"/>
+                <a:ea typeface="Calibri" panose="020F0502020204030204" pitchFamily="34" charset="0"/>
+                <a:cs typeface="Calibri" panose="020F0502020204030204" pitchFamily="34" charset="0"/>
+              </a:rPr>
               <a:t>{song1}</a:t>
             </a:r>
           </a:p>
@@ -3723,7 +3759,11 @@
           <a:p>
             <a:pPr algn="ctr"/>
             <a:r>
-              <a:rPr lang="es-PE" sz="2000" b="1" dirty="0"/>
+              <a:rPr lang="es-PE" sz="2000" b="1" dirty="0">
+                <a:latin typeface="Calibri" panose="020F0502020204030204" pitchFamily="34" charset="0"/>
+                <a:ea typeface="Calibri" panose="020F0502020204030204" pitchFamily="34" charset="0"/>
+                <a:cs typeface="Calibri" panose="020F0502020204030204" pitchFamily="34" charset="0"/>
+              </a:rPr>
               <a:t>{judge1}</a:t>
             </a:r>
           </a:p>
@@ -3782,7 +3822,11 @@
           <a:p>
             <a:pPr algn="ctr"/>
             <a:r>
-              <a:rPr lang="es-PE" sz="2000" b="1" dirty="0"/>
+              <a:rPr lang="es-PE" sz="2000" b="1" dirty="0">
+                <a:latin typeface="Calibri" panose="020F0502020204030204" pitchFamily="34" charset="0"/>
+                <a:ea typeface="Calibri" panose="020F0502020204030204" pitchFamily="34" charset="0"/>
+                <a:cs typeface="Calibri" panose="020F0502020204030204" pitchFamily="34" charset="0"/>
+              </a:rPr>
               <a:t>{score1}</a:t>
             </a:r>
           </a:p>
@@ -3840,7 +3884,11 @@
           <a:lstStyle/>
           <a:p>
             <a:pPr algn="ctr"/>
-            <a:endParaRPr lang="es-PE" sz="3600" b="1" dirty="0"/>
+            <a:endParaRPr lang="es-PE" sz="3600" b="1" dirty="0">
+              <a:latin typeface="Calibri" panose="020F0502020204030204" pitchFamily="34" charset="0"/>
+              <a:ea typeface="Calibri" panose="020F0502020204030204" pitchFamily="34" charset="0"/>
+              <a:cs typeface="Calibri" panose="020F0502020204030204" pitchFamily="34" charset="0"/>
+            </a:endParaRPr>
           </a:p>
         </p:txBody>
       </p:sp>
@@ -3897,7 +3945,11 @@
           <a:p>
             <a:pPr algn="ctr"/>
             <a:r>
-              <a:rPr lang="es-PE" sz="2000" b="1" dirty="0"/>
+              <a:rPr lang="es-PE" sz="2000" b="1" dirty="0">
+                <a:latin typeface="Calibri" panose="020F0502020204030204" pitchFamily="34" charset="0"/>
+                <a:ea typeface="Calibri" panose="020F0502020204030204" pitchFamily="34" charset="0"/>
+                <a:cs typeface="Calibri" panose="020F0502020204030204" pitchFamily="34" charset="0"/>
+              </a:rPr>
               <a:t>{song4}</a:t>
             </a:r>
           </a:p>
@@ -3956,7 +4008,11 @@
           <a:p>
             <a:pPr algn="ctr"/>
             <a:r>
-              <a:rPr lang="es-PE" sz="2000" b="1" dirty="0"/>
+              <a:rPr lang="es-PE" sz="2000" b="1" dirty="0">
+                <a:latin typeface="Calibri" panose="020F0502020204030204" pitchFamily="34" charset="0"/>
+                <a:ea typeface="Calibri" panose="020F0502020204030204" pitchFamily="34" charset="0"/>
+                <a:cs typeface="Calibri" panose="020F0502020204030204" pitchFamily="34" charset="0"/>
+              </a:rPr>
               <a:t>{judge4}</a:t>
             </a:r>
           </a:p>
@@ -4015,7 +4071,11 @@
           <a:p>
             <a:pPr algn="ctr"/>
             <a:r>
-              <a:rPr lang="es-PE" sz="2000" b="1" dirty="0"/>
+              <a:rPr lang="es-PE" sz="2000" b="1" dirty="0">
+                <a:latin typeface="Calibri" panose="020F0502020204030204" pitchFamily="34" charset="0"/>
+                <a:ea typeface="Calibri" panose="020F0502020204030204" pitchFamily="34" charset="0"/>
+                <a:cs typeface="Calibri" panose="020F0502020204030204" pitchFamily="34" charset="0"/>
+              </a:rPr>
               <a:t>{score4}</a:t>
             </a:r>
           </a:p>
@@ -4073,7 +4133,11 @@
           <a:lstStyle/>
           <a:p>
             <a:pPr algn="ctr"/>
-            <a:endParaRPr lang="es-PE" sz="3600" b="1" dirty="0"/>
+            <a:endParaRPr lang="es-PE" sz="3600" b="1" dirty="0">
+              <a:latin typeface="Calibri" panose="020F0502020204030204" pitchFamily="34" charset="0"/>
+              <a:ea typeface="Calibri" panose="020F0502020204030204" pitchFamily="34" charset="0"/>
+              <a:cs typeface="Calibri" panose="020F0502020204030204" pitchFamily="34" charset="0"/>
+            </a:endParaRPr>
           </a:p>
         </p:txBody>
       </p:sp>
@@ -4130,7 +4194,11 @@
           <a:p>
             <a:pPr algn="ctr"/>
             <a:r>
-              <a:rPr lang="es-PE" sz="2000" b="1" dirty="0"/>
+              <a:rPr lang="es-PE" sz="2000" b="1" dirty="0">
+                <a:latin typeface="Calibri" panose="020F0502020204030204" pitchFamily="34" charset="0"/>
+                <a:ea typeface="Calibri" panose="020F0502020204030204" pitchFamily="34" charset="0"/>
+                <a:cs typeface="Calibri" panose="020F0502020204030204" pitchFamily="34" charset="0"/>
+              </a:rPr>
               <a:t>{song3}</a:t>
             </a:r>
           </a:p>
@@ -4189,7 +4257,11 @@
           <a:p>
             <a:pPr algn="ctr"/>
             <a:r>
-              <a:rPr lang="es-PE" sz="2000" b="1" dirty="0"/>
+              <a:rPr lang="es-PE" sz="2000" b="1" dirty="0">
+                <a:latin typeface="Calibri" panose="020F0502020204030204" pitchFamily="34" charset="0"/>
+                <a:ea typeface="Calibri" panose="020F0502020204030204" pitchFamily="34" charset="0"/>
+                <a:cs typeface="Calibri" panose="020F0502020204030204" pitchFamily="34" charset="0"/>
+              </a:rPr>
               <a:t>{judge3}</a:t>
             </a:r>
           </a:p>
@@ -4248,7 +4320,11 @@
           <a:p>
             <a:pPr algn="ctr"/>
             <a:r>
-              <a:rPr lang="es-PE" sz="2000" b="1" dirty="0"/>
+              <a:rPr lang="es-PE" sz="2000" b="1" dirty="0">
+                <a:latin typeface="Calibri" panose="020F0502020204030204" pitchFamily="34" charset="0"/>
+                <a:ea typeface="Calibri" panose="020F0502020204030204" pitchFamily="34" charset="0"/>
+                <a:cs typeface="Calibri" panose="020F0502020204030204" pitchFamily="34" charset="0"/>
+              </a:rPr>
               <a:t>{score3}</a:t>
             </a:r>
           </a:p>
@@ -4306,7 +4382,11 @@
           <a:lstStyle/>
           <a:p>
             <a:pPr algn="ctr"/>
-            <a:endParaRPr lang="es-PE" sz="3600" b="1" dirty="0"/>
+            <a:endParaRPr lang="es-PE" sz="3600" b="1" dirty="0">
+              <a:latin typeface="Calibri" panose="020F0502020204030204" pitchFamily="34" charset="0"/>
+              <a:ea typeface="Calibri" panose="020F0502020204030204" pitchFamily="34" charset="0"/>
+              <a:cs typeface="Calibri" panose="020F0502020204030204" pitchFamily="34" charset="0"/>
+            </a:endParaRPr>
           </a:p>
         </p:txBody>
       </p:sp>
@@ -4363,7 +4443,11 @@
           <a:p>
             <a:pPr algn="ctr"/>
             <a:r>
-              <a:rPr lang="es-PE" sz="2000" b="1" dirty="0"/>
+              <a:rPr lang="es-PE" sz="2000" b="1" dirty="0">
+                <a:latin typeface="Calibri" panose="020F0502020204030204" pitchFamily="34" charset="0"/>
+                <a:ea typeface="Calibri" panose="020F0502020204030204" pitchFamily="34" charset="0"/>
+                <a:cs typeface="Calibri" panose="020F0502020204030204" pitchFamily="34" charset="0"/>
+              </a:rPr>
               <a:t>{song2}</a:t>
             </a:r>
           </a:p>
@@ -4422,7 +4506,11 @@
           <a:p>
             <a:pPr algn="ctr"/>
             <a:r>
-              <a:rPr lang="es-PE" sz="2000" b="1" dirty="0"/>
+              <a:rPr lang="es-PE" sz="2000" b="1" dirty="0">
+                <a:latin typeface="Calibri" panose="020F0502020204030204" pitchFamily="34" charset="0"/>
+                <a:ea typeface="Calibri" panose="020F0502020204030204" pitchFamily="34" charset="0"/>
+                <a:cs typeface="Calibri" panose="020F0502020204030204" pitchFamily="34" charset="0"/>
+              </a:rPr>
               <a:t>{judge2}</a:t>
             </a:r>
           </a:p>
@@ -4481,7 +4569,11 @@
           <a:p>
             <a:pPr algn="ctr"/>
             <a:r>
-              <a:rPr lang="es-PE" sz="2000" b="1" dirty="0"/>
+              <a:rPr lang="es-PE" sz="2000" b="1" dirty="0">
+                <a:latin typeface="Calibri" panose="020F0502020204030204" pitchFamily="34" charset="0"/>
+                <a:ea typeface="Calibri" panose="020F0502020204030204" pitchFamily="34" charset="0"/>
+                <a:cs typeface="Calibri" panose="020F0502020204030204" pitchFamily="34" charset="0"/>
+              </a:rPr>
               <a:t>{score2}</a:t>
             </a:r>
           </a:p>
@@ -4534,7 +4626,11 @@
           <a:p>
             <a:pPr algn="ctr"/>
             <a:r>
-              <a:rPr lang="es-PE" sz="1400" dirty="0"/>
+              <a:rPr lang="es-PE" sz="1400" dirty="0">
+                <a:latin typeface="Calibri" panose="020F0502020204030204" pitchFamily="34" charset="0"/>
+                <a:ea typeface="Calibri" panose="020F0502020204030204" pitchFamily="34" charset="0"/>
+                <a:cs typeface="Calibri" panose="020F0502020204030204" pitchFamily="34" charset="0"/>
+              </a:rPr>
               <a:t>{review1}</a:t>
             </a:r>
           </a:p>
@@ -4587,7 +4683,11 @@
           <a:p>
             <a:pPr algn="ctr"/>
             <a:r>
-              <a:rPr lang="es-PE" sz="1400" dirty="0"/>
+              <a:rPr lang="es-PE" sz="1400" dirty="0">
+                <a:latin typeface="Calibri" panose="020F0502020204030204" pitchFamily="34" charset="0"/>
+                <a:ea typeface="Calibri" panose="020F0502020204030204" pitchFamily="34" charset="0"/>
+                <a:cs typeface="Calibri" panose="020F0502020204030204" pitchFamily="34" charset="0"/>
+              </a:rPr>
               <a:t>{review2}</a:t>
             </a:r>
           </a:p>
@@ -4640,7 +4740,11 @@
           <a:p>
             <a:pPr algn="ctr"/>
             <a:r>
-              <a:rPr lang="es-PE" sz="1400" dirty="0"/>
+              <a:rPr lang="es-PE" sz="1400" dirty="0">
+                <a:latin typeface="Calibri" panose="020F0502020204030204" pitchFamily="34" charset="0"/>
+                <a:ea typeface="Calibri" panose="020F0502020204030204" pitchFamily="34" charset="0"/>
+                <a:cs typeface="Calibri" panose="020F0502020204030204" pitchFamily="34" charset="0"/>
+              </a:rPr>
               <a:t>{review3}</a:t>
             </a:r>
           </a:p>
@@ -4693,7 +4797,11 @@
           <a:p>
             <a:pPr algn="ctr"/>
             <a:r>
-              <a:rPr lang="es-PE" sz="1400" dirty="0"/>
+              <a:rPr lang="es-PE" sz="1400" dirty="0">
+                <a:latin typeface="Calibri" panose="020F0502020204030204" pitchFamily="34" charset="0"/>
+                <a:ea typeface="Calibri" panose="020F0502020204030204" pitchFamily="34" charset="0"/>
+                <a:cs typeface="Calibri" panose="020F0502020204030204" pitchFamily="34" charset="0"/>
+              </a:rPr>
               <a:t>{review4}</a:t>
             </a:r>
           </a:p>
@@ -4751,7 +4859,11 @@
           <a:lstStyle/>
           <a:p>
             <a:pPr algn="ctr"/>
-            <a:endParaRPr lang="es-PE" sz="3600" b="1" dirty="0"/>
+            <a:endParaRPr lang="es-PE" sz="3600" b="1" dirty="0">
+              <a:latin typeface="Calibri" panose="020F0502020204030204" pitchFamily="34" charset="0"/>
+              <a:ea typeface="Calibri" panose="020F0502020204030204" pitchFamily="34" charset="0"/>
+              <a:cs typeface="Calibri" panose="020F0502020204030204" pitchFamily="34" charset="0"/>
+            </a:endParaRPr>
           </a:p>
         </p:txBody>
       </p:sp>
@@ -4804,7 +4916,11 @@
           <a:p>
             <a:pPr algn="ctr"/>
             <a:r>
-              <a:rPr lang="es-PE" sz="3600" b="1" dirty="0"/>
+              <a:rPr lang="es-PE" sz="3600" b="1" dirty="0">
+                <a:latin typeface="Calibri" panose="020F0502020204030204" pitchFamily="34" charset="0"/>
+                <a:ea typeface="Calibri" panose="020F0502020204030204" pitchFamily="34" charset="0"/>
+                <a:cs typeface="Calibri" panose="020F0502020204030204" pitchFamily="34" charset="0"/>
+              </a:rPr>
               <a:t>#{p}</a:t>
             </a:r>
           </a:p>
@@ -4844,6 +4960,9 @@
                 <a:solidFill>
                   <a:schemeClr val="bg1"/>
                 </a:solidFill>
+                <a:latin typeface="Calibri" panose="020F0502020204030204" pitchFamily="34" charset="0"/>
+                <a:ea typeface="Calibri" panose="020F0502020204030204" pitchFamily="34" charset="0"/>
+                <a:cs typeface="Calibri" panose="020F0502020204030204" pitchFamily="34" charset="0"/>
               </a:rPr>
               <a:t>{avatar}</a:t>
             </a:r>

--- a/apps/md-backend/src/main/resources/templates/master_templates_4j.pptx
+++ b/apps/md-backend/src/main/resources/templates/master_templates_4j.pptx
@@ -265,7 +265,7 @@
           <a:p>
             <a:fld id="{45F062A3-8868-478A-95F9-B75BA86CF6E5}" type="datetimeFigureOut">
               <a:rPr lang="es-PE" smtClean="0"/>
-              <a:t>11/09/2026</a:t>
+              <a:t>16/09/2026</a:t>
             </a:fld>
             <a:endParaRPr lang="es-PE"/>
           </a:p>
@@ -465,7 +465,7 @@
           <a:p>
             <a:fld id="{45F062A3-8868-478A-95F9-B75BA86CF6E5}" type="datetimeFigureOut">
               <a:rPr lang="es-PE" smtClean="0"/>
-              <a:t>11/09/2026</a:t>
+              <a:t>16/09/2026</a:t>
             </a:fld>
             <a:endParaRPr lang="es-PE"/>
           </a:p>
@@ -675,7 +675,7 @@
           <a:p>
             <a:fld id="{45F062A3-8868-478A-95F9-B75BA86CF6E5}" type="datetimeFigureOut">
               <a:rPr lang="es-PE" smtClean="0"/>
-              <a:t>11/09/2026</a:t>
+              <a:t>16/09/2026</a:t>
             </a:fld>
             <a:endParaRPr lang="es-PE"/>
           </a:p>
@@ -875,7 +875,7 @@
           <a:p>
             <a:fld id="{45F062A3-8868-478A-95F9-B75BA86CF6E5}" type="datetimeFigureOut">
               <a:rPr lang="es-PE" smtClean="0"/>
-              <a:t>11/09/2026</a:t>
+              <a:t>16/09/2026</a:t>
             </a:fld>
             <a:endParaRPr lang="es-PE"/>
           </a:p>
@@ -1151,7 +1151,7 @@
           <a:p>
             <a:fld id="{45F062A3-8868-478A-95F9-B75BA86CF6E5}" type="datetimeFigureOut">
               <a:rPr lang="es-PE" smtClean="0"/>
-              <a:t>11/09/2026</a:t>
+              <a:t>16/09/2026</a:t>
             </a:fld>
             <a:endParaRPr lang="es-PE"/>
           </a:p>
@@ -1419,7 +1419,7 @@
           <a:p>
             <a:fld id="{45F062A3-8868-478A-95F9-B75BA86CF6E5}" type="datetimeFigureOut">
               <a:rPr lang="es-PE" smtClean="0"/>
-              <a:t>11/09/2026</a:t>
+              <a:t>16/09/2026</a:t>
             </a:fld>
             <a:endParaRPr lang="es-PE"/>
           </a:p>
@@ -1834,7 +1834,7 @@
           <a:p>
             <a:fld id="{45F062A3-8868-478A-95F9-B75BA86CF6E5}" type="datetimeFigureOut">
               <a:rPr lang="es-PE" smtClean="0"/>
-              <a:t>11/09/2026</a:t>
+              <a:t>16/09/2026</a:t>
             </a:fld>
             <a:endParaRPr lang="es-PE"/>
           </a:p>
@@ -1976,7 +1976,7 @@
           <a:p>
             <a:fld id="{45F062A3-8868-478A-95F9-B75BA86CF6E5}" type="datetimeFigureOut">
               <a:rPr lang="es-PE" smtClean="0"/>
-              <a:t>11/09/2026</a:t>
+              <a:t>16/09/2026</a:t>
             </a:fld>
             <a:endParaRPr lang="es-PE"/>
           </a:p>
@@ -2089,7 +2089,7 @@
           <a:p>
             <a:fld id="{45F062A3-8868-478A-95F9-B75BA86CF6E5}" type="datetimeFigureOut">
               <a:rPr lang="es-PE" smtClean="0"/>
-              <a:t>11/09/2026</a:t>
+              <a:t>16/09/2026</a:t>
             </a:fld>
             <a:endParaRPr lang="es-PE"/>
           </a:p>
@@ -2402,7 +2402,7 @@
           <a:p>
             <a:fld id="{45F062A3-8868-478A-95F9-B75BA86CF6E5}" type="datetimeFigureOut">
               <a:rPr lang="es-PE" smtClean="0"/>
-              <a:t>11/09/2026</a:t>
+              <a:t>16/09/2026</a:t>
             </a:fld>
             <a:endParaRPr lang="es-PE"/>
           </a:p>
@@ -2691,7 +2691,7 @@
           <a:p>
             <a:fld id="{45F062A3-8868-478A-95F9-B75BA86CF6E5}" type="datetimeFigureOut">
               <a:rPr lang="es-PE" smtClean="0"/>
-              <a:t>11/09/2026</a:t>
+              <a:t>16/09/2026</a:t>
             </a:fld>
             <a:endParaRPr lang="es-PE"/>
           </a:p>
@@ -2934,7 +2934,7 @@
           <a:p>
             <a:fld id="{45F062A3-8868-478A-95F9-B75BA86CF6E5}" type="datetimeFigureOut">
               <a:rPr lang="es-PE" smtClean="0"/>
-              <a:t>11/09/2026</a:t>
+              <a:t>16/09/2026</a:t>
             </a:fld>
             <a:endParaRPr lang="es-PE"/>
           </a:p>
@@ -3695,14 +3695,11 @@
           <a:lstStyle/>
           <a:p>
             <a:pPr algn="ctr"/>
-            <a:r>
-              <a:rPr lang="es-PE" sz="2000" b="1" dirty="0">
-                <a:latin typeface="Calibri" panose="020F0502020204030204" pitchFamily="34" charset="0"/>
-                <a:ea typeface="Calibri" panose="020F0502020204030204" pitchFamily="34" charset="0"/>
-                <a:cs typeface="Calibri" panose="020F0502020204030204" pitchFamily="34" charset="0"/>
-              </a:rPr>
-              <a:t>{song1}</a:t>
-            </a:r>
+            <a:endParaRPr lang="es-PE" sz="2000" b="1" dirty="0">
+              <a:latin typeface="Calibri" panose="020F0502020204030204" pitchFamily="34" charset="0"/>
+              <a:ea typeface="Calibri" panose="020F0502020204030204" pitchFamily="34" charset="0"/>
+              <a:cs typeface="Calibri" panose="020F0502020204030204" pitchFamily="34" charset="0"/>
+            </a:endParaRPr>
           </a:p>
         </p:txBody>
       </p:sp>
@@ -3944,14 +3941,11 @@
           <a:lstStyle/>
           <a:p>
             <a:pPr algn="ctr"/>
-            <a:r>
-              <a:rPr lang="es-PE" sz="2000" b="1" dirty="0">
-                <a:latin typeface="Calibri" panose="020F0502020204030204" pitchFamily="34" charset="0"/>
-                <a:ea typeface="Calibri" panose="020F0502020204030204" pitchFamily="34" charset="0"/>
-                <a:cs typeface="Calibri" panose="020F0502020204030204" pitchFamily="34" charset="0"/>
-              </a:rPr>
-              <a:t>{song4}</a:t>
-            </a:r>
+            <a:endParaRPr lang="es-PE" sz="2000" b="1" dirty="0">
+              <a:latin typeface="Calibri" panose="020F0502020204030204" pitchFamily="34" charset="0"/>
+              <a:ea typeface="Calibri" panose="020F0502020204030204" pitchFamily="34" charset="0"/>
+              <a:cs typeface="Calibri" panose="020F0502020204030204" pitchFamily="34" charset="0"/>
+            </a:endParaRPr>
           </a:p>
         </p:txBody>
       </p:sp>
@@ -4193,14 +4187,11 @@
           <a:lstStyle/>
           <a:p>
             <a:pPr algn="ctr"/>
-            <a:r>
-              <a:rPr lang="es-PE" sz="2000" b="1" dirty="0">
-                <a:latin typeface="Calibri" panose="020F0502020204030204" pitchFamily="34" charset="0"/>
-                <a:ea typeface="Calibri" panose="020F0502020204030204" pitchFamily="34" charset="0"/>
-                <a:cs typeface="Calibri" panose="020F0502020204030204" pitchFamily="34" charset="0"/>
-              </a:rPr>
-              <a:t>{song3}</a:t>
-            </a:r>
+            <a:endParaRPr lang="es-PE" sz="2000" b="1" dirty="0">
+              <a:latin typeface="Calibri" panose="020F0502020204030204" pitchFamily="34" charset="0"/>
+              <a:ea typeface="Calibri" panose="020F0502020204030204" pitchFamily="34" charset="0"/>
+              <a:cs typeface="Calibri" panose="020F0502020204030204" pitchFamily="34" charset="0"/>
+            </a:endParaRPr>
           </a:p>
         </p:txBody>
       </p:sp>
@@ -4442,14 +4433,11 @@
           <a:lstStyle/>
           <a:p>
             <a:pPr algn="ctr"/>
-            <a:r>
-              <a:rPr lang="es-PE" sz="2000" b="1" dirty="0">
-                <a:latin typeface="Calibri" panose="020F0502020204030204" pitchFamily="34" charset="0"/>
-                <a:ea typeface="Calibri" panose="020F0502020204030204" pitchFamily="34" charset="0"/>
-                <a:cs typeface="Calibri" panose="020F0502020204030204" pitchFamily="34" charset="0"/>
-              </a:rPr>
-              <a:t>{song2}</a:t>
-            </a:r>
+            <a:endParaRPr lang="es-PE" sz="2000" b="1" dirty="0">
+              <a:latin typeface="Calibri" panose="020F0502020204030204" pitchFamily="34" charset="0"/>
+              <a:ea typeface="Calibri" panose="020F0502020204030204" pitchFamily="34" charset="0"/>
+              <a:cs typeface="Calibri" panose="020F0502020204030204" pitchFamily="34" charset="0"/>
+            </a:endParaRPr>
           </a:p>
         </p:txBody>
       </p:sp>
@@ -4965,6 +4953,178 @@
                 <a:cs typeface="Calibri" panose="020F0502020204030204" pitchFamily="34" charset="0"/>
               </a:rPr>
               <a:t>{avatar}</a:t>
+            </a:r>
+          </a:p>
+        </p:txBody>
+      </p:sp>
+      <p:sp>
+        <p:nvSpPr>
+          <p:cNvPr id="10" name="TextBox 9">
+            <a:extLst>
+              <a:ext uri="{FF2B5EF4-FFF2-40B4-BE49-F238E27FC236}">
+                <a16:creationId xmlns:a16="http://schemas.microsoft.com/office/drawing/2014/main" id="{EE9DE1F3-322E-6E21-3D39-B092854113F3}"/>
+              </a:ext>
+            </a:extLst>
+          </p:cNvPr>
+          <p:cNvSpPr txBox="1"/>
+          <p:nvPr/>
+        </p:nvSpPr>
+        <p:spPr>
+          <a:xfrm>
+            <a:off x="2724150" y="1753004"/>
+            <a:ext cx="6743696" cy="369332"/>
+          </a:xfrm>
+          <a:prstGeom prst="rect">
+            <a:avLst/>
+          </a:prstGeom>
+          <a:noFill/>
+        </p:spPr>
+        <p:txBody>
+          <a:bodyPr wrap="square" rtlCol="0">
+            <a:spAutoFit/>
+          </a:bodyPr>
+          <a:lstStyle/>
+          <a:p>
+            <a:pPr algn="ctr"/>
+            <a:r>
+              <a:rPr lang="es-PE" b="1" dirty="0">
+                <a:solidFill>
+                  <a:schemeClr val="lt1"/>
+                </a:solidFill>
+                <a:latin typeface="Calibri" panose="020F0502020204030204" pitchFamily="34" charset="0"/>
+                <a:ea typeface="Calibri" panose="020F0502020204030204" pitchFamily="34" charset="0"/>
+                <a:cs typeface="Calibri" panose="020F0502020204030204" pitchFamily="34" charset="0"/>
+              </a:rPr>
+              <a:t>{song1}</a:t>
+            </a:r>
+          </a:p>
+        </p:txBody>
+      </p:sp>
+      <p:sp>
+        <p:nvSpPr>
+          <p:cNvPr id="17" name="TextBox 16">
+            <a:extLst>
+              <a:ext uri="{FF2B5EF4-FFF2-40B4-BE49-F238E27FC236}">
+                <a16:creationId xmlns:a16="http://schemas.microsoft.com/office/drawing/2014/main" id="{FCD60390-C88D-BA89-203C-7A9421C93095}"/>
+              </a:ext>
+            </a:extLst>
+          </p:cNvPr>
+          <p:cNvSpPr txBox="1"/>
+          <p:nvPr/>
+        </p:nvSpPr>
+        <p:spPr>
+          <a:xfrm>
+            <a:off x="2724147" y="2928652"/>
+            <a:ext cx="6743696" cy="369332"/>
+          </a:xfrm>
+          <a:prstGeom prst="rect">
+            <a:avLst/>
+          </a:prstGeom>
+          <a:noFill/>
+        </p:spPr>
+        <p:txBody>
+          <a:bodyPr wrap="square" rtlCol="0">
+            <a:spAutoFit/>
+          </a:bodyPr>
+          <a:lstStyle/>
+          <a:p>
+            <a:pPr algn="ctr"/>
+            <a:r>
+              <a:rPr lang="es-PE" b="1" dirty="0">
+                <a:solidFill>
+                  <a:schemeClr val="lt1"/>
+                </a:solidFill>
+                <a:latin typeface="Calibri" panose="020F0502020204030204" pitchFamily="34" charset="0"/>
+                <a:ea typeface="Calibri" panose="020F0502020204030204" pitchFamily="34" charset="0"/>
+                <a:cs typeface="Calibri" panose="020F0502020204030204" pitchFamily="34" charset="0"/>
+              </a:rPr>
+              <a:t>{song2}</a:t>
+            </a:r>
+          </a:p>
+        </p:txBody>
+      </p:sp>
+      <p:sp>
+        <p:nvSpPr>
+          <p:cNvPr id="19" name="TextBox 18">
+            <a:extLst>
+              <a:ext uri="{FF2B5EF4-FFF2-40B4-BE49-F238E27FC236}">
+                <a16:creationId xmlns:a16="http://schemas.microsoft.com/office/drawing/2014/main" id="{DA735B2E-367D-2F5C-3A75-A3B8CCB000BA}"/>
+              </a:ext>
+            </a:extLst>
+          </p:cNvPr>
+          <p:cNvSpPr txBox="1"/>
+          <p:nvPr/>
+        </p:nvSpPr>
+        <p:spPr>
+          <a:xfrm>
+            <a:off x="2724147" y="4125192"/>
+            <a:ext cx="6743696" cy="369332"/>
+          </a:xfrm>
+          <a:prstGeom prst="rect">
+            <a:avLst/>
+          </a:prstGeom>
+          <a:noFill/>
+        </p:spPr>
+        <p:txBody>
+          <a:bodyPr wrap="square" rtlCol="0">
+            <a:spAutoFit/>
+          </a:bodyPr>
+          <a:lstStyle/>
+          <a:p>
+            <a:pPr algn="ctr"/>
+            <a:r>
+              <a:rPr lang="es-PE" b="1" dirty="0">
+                <a:solidFill>
+                  <a:schemeClr val="lt1"/>
+                </a:solidFill>
+                <a:latin typeface="Calibri" panose="020F0502020204030204" pitchFamily="34" charset="0"/>
+                <a:ea typeface="Calibri" panose="020F0502020204030204" pitchFamily="34" charset="0"/>
+                <a:cs typeface="Calibri" panose="020F0502020204030204" pitchFamily="34" charset="0"/>
+              </a:rPr>
+              <a:t>{song3}</a:t>
+            </a:r>
+          </a:p>
+        </p:txBody>
+      </p:sp>
+      <p:sp>
+        <p:nvSpPr>
+          <p:cNvPr id="21" name="TextBox 20">
+            <a:extLst>
+              <a:ext uri="{FF2B5EF4-FFF2-40B4-BE49-F238E27FC236}">
+                <a16:creationId xmlns:a16="http://schemas.microsoft.com/office/drawing/2014/main" id="{61278B50-B4CF-D54F-BF8A-EBC5F7A6BCE5}"/>
+              </a:ext>
+            </a:extLst>
+          </p:cNvPr>
+          <p:cNvSpPr txBox="1"/>
+          <p:nvPr/>
+        </p:nvSpPr>
+        <p:spPr>
+          <a:xfrm>
+            <a:off x="2724147" y="5319932"/>
+            <a:ext cx="6743696" cy="369332"/>
+          </a:xfrm>
+          <a:prstGeom prst="rect">
+            <a:avLst/>
+          </a:prstGeom>
+          <a:noFill/>
+        </p:spPr>
+        <p:txBody>
+          <a:bodyPr wrap="square" rtlCol="0">
+            <a:spAutoFit/>
+          </a:bodyPr>
+          <a:lstStyle/>
+          <a:p>
+            <a:pPr algn="ctr"/>
+            <a:r>
+              <a:rPr lang="es-PE" b="1" dirty="0">
+                <a:solidFill>
+                  <a:schemeClr val="lt1"/>
+                </a:solidFill>
+                <a:latin typeface="Calibri" panose="020F0502020204030204" pitchFamily="34" charset="0"/>
+                <a:ea typeface="Calibri" panose="020F0502020204030204" pitchFamily="34" charset="0"/>
+                <a:cs typeface="Calibri" panose="020F0502020204030204" pitchFamily="34" charset="0"/>
+              </a:rPr>
+              <a:t>{song4}</a:t>
             </a:r>
           </a:p>
         </p:txBody>
@@ -5495,23 +5655,20 @@
               <a:tabLst/>
               <a:defRPr/>
             </a:pPr>
-            <a:r>
-              <a:rPr kumimoji="0" lang="es-PE" sz="2000" b="1" i="0" u="none" strike="noStrike" kern="1200" cap="none" spc="0" normalizeH="0" baseline="0" noProof="0" dirty="0">
-                <a:ln>
-                  <a:noFill/>
-                </a:ln>
-                <a:solidFill>
-                  <a:prstClr val="white"/>
-                </a:solidFill>
-                <a:effectLst/>
-                <a:uLnTx/>
-                <a:uFillTx/>
-                <a:latin typeface="Calibri" panose="020F0502020204030204"/>
-                <a:ea typeface="+mn-ea"/>
-                <a:cs typeface="+mn-cs"/>
-              </a:rPr>
-              <a:t>{song1}</a:t>
-            </a:r>
+            <a:endParaRPr kumimoji="0" lang="es-PE" sz="2000" b="1" i="0" u="none" strike="noStrike" kern="1200" cap="none" spc="0" normalizeH="0" baseline="0" noProof="0" dirty="0">
+              <a:ln>
+                <a:noFill/>
+              </a:ln>
+              <a:solidFill>
+                <a:prstClr val="white"/>
+              </a:solidFill>
+              <a:effectLst/>
+              <a:uLnTx/>
+              <a:uFillTx/>
+              <a:latin typeface="Calibri" panose="020F0502020204030204"/>
+              <a:ea typeface="+mn-ea"/>
+              <a:cs typeface="+mn-cs"/>
+            </a:endParaRPr>
           </a:p>
         </p:txBody>
       </p:sp>
@@ -5844,23 +6001,20 @@
               <a:tabLst/>
               <a:defRPr/>
             </a:pPr>
-            <a:r>
-              <a:rPr kumimoji="0" lang="es-PE" sz="2000" b="1" i="0" u="none" strike="noStrike" kern="1200" cap="none" spc="0" normalizeH="0" baseline="0" noProof="0" dirty="0">
-                <a:ln>
-                  <a:noFill/>
-                </a:ln>
-                <a:solidFill>
-                  <a:prstClr val="white"/>
-                </a:solidFill>
-                <a:effectLst/>
-                <a:uLnTx/>
-                <a:uFillTx/>
-                <a:latin typeface="Calibri" panose="020F0502020204030204"/>
-                <a:ea typeface="+mn-ea"/>
-                <a:cs typeface="+mn-cs"/>
-              </a:rPr>
-              <a:t>{song4}</a:t>
-            </a:r>
+            <a:endParaRPr kumimoji="0" lang="es-PE" sz="2000" b="1" i="0" u="none" strike="noStrike" kern="1200" cap="none" spc="0" normalizeH="0" baseline="0" noProof="0" dirty="0">
+              <a:ln>
+                <a:noFill/>
+              </a:ln>
+              <a:solidFill>
+                <a:prstClr val="white"/>
+              </a:solidFill>
+              <a:effectLst/>
+              <a:uLnTx/>
+              <a:uFillTx/>
+              <a:latin typeface="Calibri" panose="020F0502020204030204"/>
+              <a:ea typeface="+mn-ea"/>
+              <a:cs typeface="+mn-cs"/>
+            </a:endParaRPr>
           </a:p>
         </p:txBody>
       </p:sp>
@@ -6193,23 +6347,20 @@
               <a:tabLst/>
               <a:defRPr/>
             </a:pPr>
-            <a:r>
-              <a:rPr kumimoji="0" lang="es-PE" sz="2000" b="1" i="0" u="none" strike="noStrike" kern="1200" cap="none" spc="0" normalizeH="0" baseline="0" noProof="0" dirty="0">
-                <a:ln>
-                  <a:noFill/>
-                </a:ln>
-                <a:solidFill>
-                  <a:prstClr val="white"/>
-                </a:solidFill>
-                <a:effectLst/>
-                <a:uLnTx/>
-                <a:uFillTx/>
-                <a:latin typeface="Calibri" panose="020F0502020204030204"/>
-                <a:ea typeface="+mn-ea"/>
-                <a:cs typeface="+mn-cs"/>
-              </a:rPr>
-              <a:t>{song3}</a:t>
-            </a:r>
+            <a:endParaRPr kumimoji="0" lang="es-PE" sz="2000" b="1" i="0" u="none" strike="noStrike" kern="1200" cap="none" spc="0" normalizeH="0" baseline="0" noProof="0" dirty="0">
+              <a:ln>
+                <a:noFill/>
+              </a:ln>
+              <a:solidFill>
+                <a:prstClr val="white"/>
+              </a:solidFill>
+              <a:effectLst/>
+              <a:uLnTx/>
+              <a:uFillTx/>
+              <a:latin typeface="Calibri" panose="020F0502020204030204"/>
+              <a:ea typeface="+mn-ea"/>
+              <a:cs typeface="+mn-cs"/>
+            </a:endParaRPr>
           </a:p>
         </p:txBody>
       </p:sp>
@@ -6542,23 +6693,20 @@
               <a:tabLst/>
               <a:defRPr/>
             </a:pPr>
-            <a:r>
-              <a:rPr kumimoji="0" lang="es-PE" sz="2000" b="1" i="0" u="none" strike="noStrike" kern="1200" cap="none" spc="0" normalizeH="0" baseline="0" noProof="0" dirty="0">
-                <a:ln>
-                  <a:noFill/>
-                </a:ln>
-                <a:solidFill>
-                  <a:prstClr val="white"/>
-                </a:solidFill>
-                <a:effectLst/>
-                <a:uLnTx/>
-                <a:uFillTx/>
-                <a:latin typeface="Calibri" panose="020F0502020204030204"/>
-                <a:ea typeface="+mn-ea"/>
-                <a:cs typeface="+mn-cs"/>
-              </a:rPr>
-              <a:t>{song2}</a:t>
-            </a:r>
+            <a:endParaRPr kumimoji="0" lang="es-PE" sz="2000" b="1" i="0" u="none" strike="noStrike" kern="1200" cap="none" spc="0" normalizeH="0" baseline="0" noProof="0" dirty="0">
+              <a:ln>
+                <a:noFill/>
+              </a:ln>
+              <a:solidFill>
+                <a:prstClr val="white"/>
+              </a:solidFill>
+              <a:effectLst/>
+              <a:uLnTx/>
+              <a:uFillTx/>
+              <a:latin typeface="Calibri" panose="020F0502020204030204"/>
+              <a:ea typeface="+mn-ea"/>
+              <a:cs typeface="+mn-cs"/>
+            </a:endParaRPr>
           </a:p>
         </p:txBody>
       </p:sp>
@@ -7394,6 +7542,178 @@
           </a:p>
         </p:txBody>
       </p:sp>
+      <p:sp>
+        <p:nvSpPr>
+          <p:cNvPr id="6" name="TextBox 5">
+            <a:extLst>
+              <a:ext uri="{FF2B5EF4-FFF2-40B4-BE49-F238E27FC236}">
+                <a16:creationId xmlns:a16="http://schemas.microsoft.com/office/drawing/2014/main" id="{E2821EC5-C390-C070-DE62-0C7C6DBA738C}"/>
+              </a:ext>
+            </a:extLst>
+          </p:cNvPr>
+          <p:cNvSpPr txBox="1"/>
+          <p:nvPr/>
+        </p:nvSpPr>
+        <p:spPr>
+          <a:xfrm>
+            <a:off x="2724150" y="1753004"/>
+            <a:ext cx="6743696" cy="369332"/>
+          </a:xfrm>
+          <a:prstGeom prst="rect">
+            <a:avLst/>
+          </a:prstGeom>
+          <a:noFill/>
+        </p:spPr>
+        <p:txBody>
+          <a:bodyPr wrap="square" rtlCol="0">
+            <a:spAutoFit/>
+          </a:bodyPr>
+          <a:lstStyle/>
+          <a:p>
+            <a:pPr algn="ctr"/>
+            <a:r>
+              <a:rPr lang="es-PE" b="1" dirty="0">
+                <a:solidFill>
+                  <a:schemeClr val="lt1"/>
+                </a:solidFill>
+                <a:latin typeface="Calibri" panose="020F0502020204030204" pitchFamily="34" charset="0"/>
+                <a:ea typeface="Calibri" panose="020F0502020204030204" pitchFamily="34" charset="0"/>
+                <a:cs typeface="Calibri" panose="020F0502020204030204" pitchFamily="34" charset="0"/>
+              </a:rPr>
+              <a:t>{song1}</a:t>
+            </a:r>
+          </a:p>
+        </p:txBody>
+      </p:sp>
+      <p:sp>
+        <p:nvSpPr>
+          <p:cNvPr id="10" name="TextBox 9">
+            <a:extLst>
+              <a:ext uri="{FF2B5EF4-FFF2-40B4-BE49-F238E27FC236}">
+                <a16:creationId xmlns:a16="http://schemas.microsoft.com/office/drawing/2014/main" id="{430E6BA5-FBAA-2B55-FA0A-5E809D69D8E8}"/>
+              </a:ext>
+            </a:extLst>
+          </p:cNvPr>
+          <p:cNvSpPr txBox="1"/>
+          <p:nvPr/>
+        </p:nvSpPr>
+        <p:spPr>
+          <a:xfrm>
+            <a:off x="2724147" y="2928652"/>
+            <a:ext cx="6743696" cy="369332"/>
+          </a:xfrm>
+          <a:prstGeom prst="rect">
+            <a:avLst/>
+          </a:prstGeom>
+          <a:noFill/>
+        </p:spPr>
+        <p:txBody>
+          <a:bodyPr wrap="square" rtlCol="0">
+            <a:spAutoFit/>
+          </a:bodyPr>
+          <a:lstStyle/>
+          <a:p>
+            <a:pPr algn="ctr"/>
+            <a:r>
+              <a:rPr lang="es-PE" b="1" dirty="0">
+                <a:solidFill>
+                  <a:schemeClr val="lt1"/>
+                </a:solidFill>
+                <a:latin typeface="Calibri" panose="020F0502020204030204" pitchFamily="34" charset="0"/>
+                <a:ea typeface="Calibri" panose="020F0502020204030204" pitchFamily="34" charset="0"/>
+                <a:cs typeface="Calibri" panose="020F0502020204030204" pitchFamily="34" charset="0"/>
+              </a:rPr>
+              <a:t>{song2}</a:t>
+            </a:r>
+          </a:p>
+        </p:txBody>
+      </p:sp>
+      <p:sp>
+        <p:nvSpPr>
+          <p:cNvPr id="17" name="TextBox 16">
+            <a:extLst>
+              <a:ext uri="{FF2B5EF4-FFF2-40B4-BE49-F238E27FC236}">
+                <a16:creationId xmlns:a16="http://schemas.microsoft.com/office/drawing/2014/main" id="{B9C0DA47-1B1E-FFB6-0493-B6E08C8A3466}"/>
+              </a:ext>
+            </a:extLst>
+          </p:cNvPr>
+          <p:cNvSpPr txBox="1"/>
+          <p:nvPr/>
+        </p:nvSpPr>
+        <p:spPr>
+          <a:xfrm>
+            <a:off x="2724147" y="4125192"/>
+            <a:ext cx="6743696" cy="369332"/>
+          </a:xfrm>
+          <a:prstGeom prst="rect">
+            <a:avLst/>
+          </a:prstGeom>
+          <a:noFill/>
+        </p:spPr>
+        <p:txBody>
+          <a:bodyPr wrap="square" rtlCol="0">
+            <a:spAutoFit/>
+          </a:bodyPr>
+          <a:lstStyle/>
+          <a:p>
+            <a:pPr algn="ctr"/>
+            <a:r>
+              <a:rPr lang="es-PE" b="1" dirty="0">
+                <a:solidFill>
+                  <a:schemeClr val="lt1"/>
+                </a:solidFill>
+                <a:latin typeface="Calibri" panose="020F0502020204030204" pitchFamily="34" charset="0"/>
+                <a:ea typeface="Calibri" panose="020F0502020204030204" pitchFamily="34" charset="0"/>
+                <a:cs typeface="Calibri" panose="020F0502020204030204" pitchFamily="34" charset="0"/>
+              </a:rPr>
+              <a:t>{song3}</a:t>
+            </a:r>
+          </a:p>
+        </p:txBody>
+      </p:sp>
+      <p:sp>
+        <p:nvSpPr>
+          <p:cNvPr id="19" name="TextBox 18">
+            <a:extLst>
+              <a:ext uri="{FF2B5EF4-FFF2-40B4-BE49-F238E27FC236}">
+                <a16:creationId xmlns:a16="http://schemas.microsoft.com/office/drawing/2014/main" id="{AF0087DD-6848-BC03-55AA-A2C55F85854D}"/>
+              </a:ext>
+            </a:extLst>
+          </p:cNvPr>
+          <p:cNvSpPr txBox="1"/>
+          <p:nvPr/>
+        </p:nvSpPr>
+        <p:spPr>
+          <a:xfrm>
+            <a:off x="2724147" y="5319932"/>
+            <a:ext cx="6743696" cy="369332"/>
+          </a:xfrm>
+          <a:prstGeom prst="rect">
+            <a:avLst/>
+          </a:prstGeom>
+          <a:noFill/>
+        </p:spPr>
+        <p:txBody>
+          <a:bodyPr wrap="square" rtlCol="0">
+            <a:spAutoFit/>
+          </a:bodyPr>
+          <a:lstStyle/>
+          <a:p>
+            <a:pPr algn="ctr"/>
+            <a:r>
+              <a:rPr lang="es-PE" b="1" dirty="0">
+                <a:solidFill>
+                  <a:schemeClr val="lt1"/>
+                </a:solidFill>
+                <a:latin typeface="Calibri" panose="020F0502020204030204" pitchFamily="34" charset="0"/>
+                <a:ea typeface="Calibri" panose="020F0502020204030204" pitchFamily="34" charset="0"/>
+                <a:cs typeface="Calibri" panose="020F0502020204030204" pitchFamily="34" charset="0"/>
+              </a:rPr>
+              <a:t>{song4}</a:t>
+            </a:r>
+          </a:p>
+        </p:txBody>
+      </p:sp>
     </p:spTree>
     <p:extLst>
       <p:ext uri="{BB962C8B-B14F-4D97-AF65-F5344CB8AC3E}">
@@ -7920,23 +8240,20 @@
               <a:tabLst/>
               <a:defRPr/>
             </a:pPr>
-            <a:r>
-              <a:rPr kumimoji="0" lang="es-PE" sz="2000" b="1" i="0" u="none" strike="noStrike" kern="1200" cap="none" spc="0" normalizeH="0" baseline="0" noProof="0" dirty="0">
-                <a:ln>
-                  <a:noFill/>
-                </a:ln>
-                <a:solidFill>
-                  <a:prstClr val="white"/>
-                </a:solidFill>
-                <a:effectLst/>
-                <a:uLnTx/>
-                <a:uFillTx/>
-                <a:latin typeface="Calibri" panose="020F0502020204030204"/>
-                <a:ea typeface="+mn-ea"/>
-                <a:cs typeface="+mn-cs"/>
-              </a:rPr>
-              <a:t>{song1}</a:t>
-            </a:r>
+            <a:endParaRPr kumimoji="0" lang="es-PE" sz="2000" b="1" i="0" u="none" strike="noStrike" kern="1200" cap="none" spc="0" normalizeH="0" baseline="0" noProof="0" dirty="0">
+              <a:ln>
+                <a:noFill/>
+              </a:ln>
+              <a:solidFill>
+                <a:prstClr val="white"/>
+              </a:solidFill>
+              <a:effectLst/>
+              <a:uLnTx/>
+              <a:uFillTx/>
+              <a:latin typeface="Calibri" panose="020F0502020204030204"/>
+              <a:ea typeface="+mn-ea"/>
+              <a:cs typeface="+mn-cs"/>
+            </a:endParaRPr>
           </a:p>
         </p:txBody>
       </p:sp>
@@ -8269,23 +8586,20 @@
               <a:tabLst/>
               <a:defRPr/>
             </a:pPr>
-            <a:r>
-              <a:rPr kumimoji="0" lang="es-PE" sz="2000" b="1" i="0" u="none" strike="noStrike" kern="1200" cap="none" spc="0" normalizeH="0" baseline="0" noProof="0" dirty="0">
-                <a:ln>
-                  <a:noFill/>
-                </a:ln>
-                <a:solidFill>
-                  <a:prstClr val="white"/>
-                </a:solidFill>
-                <a:effectLst/>
-                <a:uLnTx/>
-                <a:uFillTx/>
-                <a:latin typeface="Calibri" panose="020F0502020204030204"/>
-                <a:ea typeface="+mn-ea"/>
-                <a:cs typeface="+mn-cs"/>
-              </a:rPr>
-              <a:t>{song4}</a:t>
-            </a:r>
+            <a:endParaRPr kumimoji="0" lang="es-PE" sz="2000" b="1" i="0" u="none" strike="noStrike" kern="1200" cap="none" spc="0" normalizeH="0" baseline="0" noProof="0" dirty="0">
+              <a:ln>
+                <a:noFill/>
+              </a:ln>
+              <a:solidFill>
+                <a:prstClr val="white"/>
+              </a:solidFill>
+              <a:effectLst/>
+              <a:uLnTx/>
+              <a:uFillTx/>
+              <a:latin typeface="Calibri" panose="020F0502020204030204"/>
+              <a:ea typeface="+mn-ea"/>
+              <a:cs typeface="+mn-cs"/>
+            </a:endParaRPr>
           </a:p>
         </p:txBody>
       </p:sp>
@@ -8618,23 +8932,20 @@
               <a:tabLst/>
               <a:defRPr/>
             </a:pPr>
-            <a:r>
-              <a:rPr kumimoji="0" lang="es-PE" sz="2000" b="1" i="0" u="none" strike="noStrike" kern="1200" cap="none" spc="0" normalizeH="0" baseline="0" noProof="0" dirty="0">
-                <a:ln>
-                  <a:noFill/>
-                </a:ln>
-                <a:solidFill>
-                  <a:prstClr val="white"/>
-                </a:solidFill>
-                <a:effectLst/>
-                <a:uLnTx/>
-                <a:uFillTx/>
-                <a:latin typeface="Calibri" panose="020F0502020204030204"/>
-                <a:ea typeface="+mn-ea"/>
-                <a:cs typeface="+mn-cs"/>
-              </a:rPr>
-              <a:t>{song3}</a:t>
-            </a:r>
+            <a:endParaRPr kumimoji="0" lang="es-PE" sz="2000" b="1" i="0" u="none" strike="noStrike" kern="1200" cap="none" spc="0" normalizeH="0" baseline="0" noProof="0" dirty="0">
+              <a:ln>
+                <a:noFill/>
+              </a:ln>
+              <a:solidFill>
+                <a:prstClr val="white"/>
+              </a:solidFill>
+              <a:effectLst/>
+              <a:uLnTx/>
+              <a:uFillTx/>
+              <a:latin typeface="Calibri" panose="020F0502020204030204"/>
+              <a:ea typeface="+mn-ea"/>
+              <a:cs typeface="+mn-cs"/>
+            </a:endParaRPr>
           </a:p>
         </p:txBody>
       </p:sp>
@@ -8967,23 +9278,20 @@
               <a:tabLst/>
               <a:defRPr/>
             </a:pPr>
-            <a:r>
-              <a:rPr kumimoji="0" lang="es-PE" sz="2000" b="1" i="0" u="none" strike="noStrike" kern="1200" cap="none" spc="0" normalizeH="0" baseline="0" noProof="0" dirty="0">
-                <a:ln>
-                  <a:noFill/>
-                </a:ln>
-                <a:solidFill>
-                  <a:prstClr val="white"/>
-                </a:solidFill>
-                <a:effectLst/>
-                <a:uLnTx/>
-                <a:uFillTx/>
-                <a:latin typeface="Calibri" panose="020F0502020204030204"/>
-                <a:ea typeface="+mn-ea"/>
-                <a:cs typeface="+mn-cs"/>
-              </a:rPr>
-              <a:t>{song2}</a:t>
-            </a:r>
+            <a:endParaRPr kumimoji="0" lang="es-PE" sz="2000" b="1" i="0" u="none" strike="noStrike" kern="1200" cap="none" spc="0" normalizeH="0" baseline="0" noProof="0" dirty="0">
+              <a:ln>
+                <a:noFill/>
+              </a:ln>
+              <a:solidFill>
+                <a:prstClr val="white"/>
+              </a:solidFill>
+              <a:effectLst/>
+              <a:uLnTx/>
+              <a:uFillTx/>
+              <a:latin typeface="Calibri" panose="020F0502020204030204"/>
+              <a:ea typeface="+mn-ea"/>
+              <a:cs typeface="+mn-cs"/>
+            </a:endParaRPr>
           </a:p>
         </p:txBody>
       </p:sp>
@@ -9819,6 +10127,178 @@
           </a:p>
         </p:txBody>
       </p:sp>
+      <p:sp>
+        <p:nvSpPr>
+          <p:cNvPr id="6" name="TextBox 5">
+            <a:extLst>
+              <a:ext uri="{FF2B5EF4-FFF2-40B4-BE49-F238E27FC236}">
+                <a16:creationId xmlns:a16="http://schemas.microsoft.com/office/drawing/2014/main" id="{4C4DAD56-B337-18AA-4982-BE8D16540597}"/>
+              </a:ext>
+            </a:extLst>
+          </p:cNvPr>
+          <p:cNvSpPr txBox="1"/>
+          <p:nvPr/>
+        </p:nvSpPr>
+        <p:spPr>
+          <a:xfrm>
+            <a:off x="2724150" y="1753004"/>
+            <a:ext cx="6743696" cy="369332"/>
+          </a:xfrm>
+          <a:prstGeom prst="rect">
+            <a:avLst/>
+          </a:prstGeom>
+          <a:noFill/>
+        </p:spPr>
+        <p:txBody>
+          <a:bodyPr wrap="square" rtlCol="0">
+            <a:spAutoFit/>
+          </a:bodyPr>
+          <a:lstStyle/>
+          <a:p>
+            <a:pPr algn="ctr"/>
+            <a:r>
+              <a:rPr lang="es-PE" b="1" dirty="0">
+                <a:solidFill>
+                  <a:schemeClr val="lt1"/>
+                </a:solidFill>
+                <a:latin typeface="Calibri" panose="020F0502020204030204" pitchFamily="34" charset="0"/>
+                <a:ea typeface="Calibri" panose="020F0502020204030204" pitchFamily="34" charset="0"/>
+                <a:cs typeface="Calibri" panose="020F0502020204030204" pitchFamily="34" charset="0"/>
+              </a:rPr>
+              <a:t>{song1}</a:t>
+            </a:r>
+          </a:p>
+        </p:txBody>
+      </p:sp>
+      <p:sp>
+        <p:nvSpPr>
+          <p:cNvPr id="10" name="TextBox 9">
+            <a:extLst>
+              <a:ext uri="{FF2B5EF4-FFF2-40B4-BE49-F238E27FC236}">
+                <a16:creationId xmlns:a16="http://schemas.microsoft.com/office/drawing/2014/main" id="{1360C9D8-A906-739C-605A-B186C291F1BC}"/>
+              </a:ext>
+            </a:extLst>
+          </p:cNvPr>
+          <p:cNvSpPr txBox="1"/>
+          <p:nvPr/>
+        </p:nvSpPr>
+        <p:spPr>
+          <a:xfrm>
+            <a:off x="2724147" y="2928652"/>
+            <a:ext cx="6743696" cy="369332"/>
+          </a:xfrm>
+          <a:prstGeom prst="rect">
+            <a:avLst/>
+          </a:prstGeom>
+          <a:noFill/>
+        </p:spPr>
+        <p:txBody>
+          <a:bodyPr wrap="square" rtlCol="0">
+            <a:spAutoFit/>
+          </a:bodyPr>
+          <a:lstStyle/>
+          <a:p>
+            <a:pPr algn="ctr"/>
+            <a:r>
+              <a:rPr lang="es-PE" b="1" dirty="0">
+                <a:solidFill>
+                  <a:schemeClr val="lt1"/>
+                </a:solidFill>
+                <a:latin typeface="Calibri" panose="020F0502020204030204" pitchFamily="34" charset="0"/>
+                <a:ea typeface="Calibri" panose="020F0502020204030204" pitchFamily="34" charset="0"/>
+                <a:cs typeface="Calibri" panose="020F0502020204030204" pitchFamily="34" charset="0"/>
+              </a:rPr>
+              <a:t>{song2}</a:t>
+            </a:r>
+          </a:p>
+        </p:txBody>
+      </p:sp>
+      <p:sp>
+        <p:nvSpPr>
+          <p:cNvPr id="17" name="TextBox 16">
+            <a:extLst>
+              <a:ext uri="{FF2B5EF4-FFF2-40B4-BE49-F238E27FC236}">
+                <a16:creationId xmlns:a16="http://schemas.microsoft.com/office/drawing/2014/main" id="{1A532E39-6DE9-C095-40E2-B070F27306A5}"/>
+              </a:ext>
+            </a:extLst>
+          </p:cNvPr>
+          <p:cNvSpPr txBox="1"/>
+          <p:nvPr/>
+        </p:nvSpPr>
+        <p:spPr>
+          <a:xfrm>
+            <a:off x="2724147" y="4125192"/>
+            <a:ext cx="6743696" cy="369332"/>
+          </a:xfrm>
+          <a:prstGeom prst="rect">
+            <a:avLst/>
+          </a:prstGeom>
+          <a:noFill/>
+        </p:spPr>
+        <p:txBody>
+          <a:bodyPr wrap="square" rtlCol="0">
+            <a:spAutoFit/>
+          </a:bodyPr>
+          <a:lstStyle/>
+          <a:p>
+            <a:pPr algn="ctr"/>
+            <a:r>
+              <a:rPr lang="es-PE" b="1" dirty="0">
+                <a:solidFill>
+                  <a:schemeClr val="lt1"/>
+                </a:solidFill>
+                <a:latin typeface="Calibri" panose="020F0502020204030204" pitchFamily="34" charset="0"/>
+                <a:ea typeface="Calibri" panose="020F0502020204030204" pitchFamily="34" charset="0"/>
+                <a:cs typeface="Calibri" panose="020F0502020204030204" pitchFamily="34" charset="0"/>
+              </a:rPr>
+              <a:t>{song3}</a:t>
+            </a:r>
+          </a:p>
+        </p:txBody>
+      </p:sp>
+      <p:sp>
+        <p:nvSpPr>
+          <p:cNvPr id="19" name="TextBox 18">
+            <a:extLst>
+              <a:ext uri="{FF2B5EF4-FFF2-40B4-BE49-F238E27FC236}">
+                <a16:creationId xmlns:a16="http://schemas.microsoft.com/office/drawing/2014/main" id="{0FE0F85E-3707-4A50-4E06-B538E2B54596}"/>
+              </a:ext>
+            </a:extLst>
+          </p:cNvPr>
+          <p:cNvSpPr txBox="1"/>
+          <p:nvPr/>
+        </p:nvSpPr>
+        <p:spPr>
+          <a:xfrm>
+            <a:off x="2724147" y="5319932"/>
+            <a:ext cx="6743696" cy="369332"/>
+          </a:xfrm>
+          <a:prstGeom prst="rect">
+            <a:avLst/>
+          </a:prstGeom>
+          <a:noFill/>
+        </p:spPr>
+        <p:txBody>
+          <a:bodyPr wrap="square" rtlCol="0">
+            <a:spAutoFit/>
+          </a:bodyPr>
+          <a:lstStyle/>
+          <a:p>
+            <a:pPr algn="ctr"/>
+            <a:r>
+              <a:rPr lang="es-PE" b="1" dirty="0">
+                <a:solidFill>
+                  <a:schemeClr val="lt1"/>
+                </a:solidFill>
+                <a:latin typeface="Calibri" panose="020F0502020204030204" pitchFamily="34" charset="0"/>
+                <a:ea typeface="Calibri" panose="020F0502020204030204" pitchFamily="34" charset="0"/>
+                <a:cs typeface="Calibri" panose="020F0502020204030204" pitchFamily="34" charset="0"/>
+              </a:rPr>
+              <a:t>{song4}</a:t>
+            </a:r>
+          </a:p>
+        </p:txBody>
+      </p:sp>
     </p:spTree>
     <p:extLst>
       <p:ext uri="{BB962C8B-B14F-4D97-AF65-F5344CB8AC3E}">
@@ -10345,23 +10825,20 @@
               <a:tabLst/>
               <a:defRPr/>
             </a:pPr>
-            <a:r>
-              <a:rPr kumimoji="0" lang="es-PE" sz="2000" b="1" i="0" u="none" strike="noStrike" kern="1200" cap="none" spc="0" normalizeH="0" baseline="0" noProof="0" dirty="0">
-                <a:ln>
-                  <a:noFill/>
-                </a:ln>
-                <a:solidFill>
-                  <a:prstClr val="white"/>
-                </a:solidFill>
-                <a:effectLst/>
-                <a:uLnTx/>
-                <a:uFillTx/>
-                <a:latin typeface="Calibri" panose="020F0502020204030204"/>
-                <a:ea typeface="+mn-ea"/>
-                <a:cs typeface="+mn-cs"/>
-              </a:rPr>
-              <a:t>{song1}</a:t>
-            </a:r>
+            <a:endParaRPr kumimoji="0" lang="es-PE" sz="2000" b="1" i="0" u="none" strike="noStrike" kern="1200" cap="none" spc="0" normalizeH="0" baseline="0" noProof="0" dirty="0">
+              <a:ln>
+                <a:noFill/>
+              </a:ln>
+              <a:solidFill>
+                <a:prstClr val="white"/>
+              </a:solidFill>
+              <a:effectLst/>
+              <a:uLnTx/>
+              <a:uFillTx/>
+              <a:latin typeface="Calibri" panose="020F0502020204030204"/>
+              <a:ea typeface="+mn-ea"/>
+              <a:cs typeface="+mn-cs"/>
+            </a:endParaRPr>
           </a:p>
         </p:txBody>
       </p:sp>
@@ -10694,23 +11171,20 @@
               <a:tabLst/>
               <a:defRPr/>
             </a:pPr>
-            <a:r>
-              <a:rPr kumimoji="0" lang="es-PE" sz="2000" b="1" i="0" u="none" strike="noStrike" kern="1200" cap="none" spc="0" normalizeH="0" baseline="0" noProof="0" dirty="0">
-                <a:ln>
-                  <a:noFill/>
-                </a:ln>
-                <a:solidFill>
-                  <a:prstClr val="white"/>
-                </a:solidFill>
-                <a:effectLst/>
-                <a:uLnTx/>
-                <a:uFillTx/>
-                <a:latin typeface="Calibri" panose="020F0502020204030204"/>
-                <a:ea typeface="+mn-ea"/>
-                <a:cs typeface="+mn-cs"/>
-              </a:rPr>
-              <a:t>{song4}</a:t>
-            </a:r>
+            <a:endParaRPr kumimoji="0" lang="es-PE" sz="2000" b="1" i="0" u="none" strike="noStrike" kern="1200" cap="none" spc="0" normalizeH="0" baseline="0" noProof="0" dirty="0">
+              <a:ln>
+                <a:noFill/>
+              </a:ln>
+              <a:solidFill>
+                <a:prstClr val="white"/>
+              </a:solidFill>
+              <a:effectLst/>
+              <a:uLnTx/>
+              <a:uFillTx/>
+              <a:latin typeface="Calibri" panose="020F0502020204030204"/>
+              <a:ea typeface="+mn-ea"/>
+              <a:cs typeface="+mn-cs"/>
+            </a:endParaRPr>
           </a:p>
         </p:txBody>
       </p:sp>
@@ -11043,23 +11517,20 @@
               <a:tabLst/>
               <a:defRPr/>
             </a:pPr>
-            <a:r>
-              <a:rPr kumimoji="0" lang="es-PE" sz="2000" b="1" i="0" u="none" strike="noStrike" kern="1200" cap="none" spc="0" normalizeH="0" baseline="0" noProof="0" dirty="0">
-                <a:ln>
-                  <a:noFill/>
-                </a:ln>
-                <a:solidFill>
-                  <a:prstClr val="white"/>
-                </a:solidFill>
-                <a:effectLst/>
-                <a:uLnTx/>
-                <a:uFillTx/>
-                <a:latin typeface="Calibri" panose="020F0502020204030204"/>
-                <a:ea typeface="+mn-ea"/>
-                <a:cs typeface="+mn-cs"/>
-              </a:rPr>
-              <a:t>{song3}</a:t>
-            </a:r>
+            <a:endParaRPr kumimoji="0" lang="es-PE" sz="2000" b="1" i="0" u="none" strike="noStrike" kern="1200" cap="none" spc="0" normalizeH="0" baseline="0" noProof="0" dirty="0">
+              <a:ln>
+                <a:noFill/>
+              </a:ln>
+              <a:solidFill>
+                <a:prstClr val="white"/>
+              </a:solidFill>
+              <a:effectLst/>
+              <a:uLnTx/>
+              <a:uFillTx/>
+              <a:latin typeface="Calibri" panose="020F0502020204030204"/>
+              <a:ea typeface="+mn-ea"/>
+              <a:cs typeface="+mn-cs"/>
+            </a:endParaRPr>
           </a:p>
         </p:txBody>
       </p:sp>
@@ -11392,23 +11863,20 @@
               <a:tabLst/>
               <a:defRPr/>
             </a:pPr>
-            <a:r>
-              <a:rPr kumimoji="0" lang="es-PE" sz="2000" b="1" i="0" u="none" strike="noStrike" kern="1200" cap="none" spc="0" normalizeH="0" baseline="0" noProof="0" dirty="0">
-                <a:ln>
-                  <a:noFill/>
-                </a:ln>
-                <a:solidFill>
-                  <a:prstClr val="white"/>
-                </a:solidFill>
-                <a:effectLst/>
-                <a:uLnTx/>
-                <a:uFillTx/>
-                <a:latin typeface="Calibri" panose="020F0502020204030204"/>
-                <a:ea typeface="+mn-ea"/>
-                <a:cs typeface="+mn-cs"/>
-              </a:rPr>
-              <a:t>{song2}</a:t>
-            </a:r>
+            <a:endParaRPr kumimoji="0" lang="es-PE" sz="2000" b="1" i="0" u="none" strike="noStrike" kern="1200" cap="none" spc="0" normalizeH="0" baseline="0" noProof="0" dirty="0">
+              <a:ln>
+                <a:noFill/>
+              </a:ln>
+              <a:solidFill>
+                <a:prstClr val="white"/>
+              </a:solidFill>
+              <a:effectLst/>
+              <a:uLnTx/>
+              <a:uFillTx/>
+              <a:latin typeface="Calibri" panose="020F0502020204030204"/>
+              <a:ea typeface="+mn-ea"/>
+              <a:cs typeface="+mn-cs"/>
+            </a:endParaRPr>
           </a:p>
         </p:txBody>
       </p:sp>
@@ -12244,6 +12712,178 @@
           </a:p>
         </p:txBody>
       </p:sp>
+      <p:sp>
+        <p:nvSpPr>
+          <p:cNvPr id="6" name="TextBox 5">
+            <a:extLst>
+              <a:ext uri="{FF2B5EF4-FFF2-40B4-BE49-F238E27FC236}">
+                <a16:creationId xmlns:a16="http://schemas.microsoft.com/office/drawing/2014/main" id="{B18C9AEF-7F68-63EA-E53F-C4088B9F9AB4}"/>
+              </a:ext>
+            </a:extLst>
+          </p:cNvPr>
+          <p:cNvSpPr txBox="1"/>
+          <p:nvPr/>
+        </p:nvSpPr>
+        <p:spPr>
+          <a:xfrm>
+            <a:off x="2724150" y="1753004"/>
+            <a:ext cx="6743696" cy="369332"/>
+          </a:xfrm>
+          <a:prstGeom prst="rect">
+            <a:avLst/>
+          </a:prstGeom>
+          <a:noFill/>
+        </p:spPr>
+        <p:txBody>
+          <a:bodyPr wrap="square" rtlCol="0">
+            <a:spAutoFit/>
+          </a:bodyPr>
+          <a:lstStyle/>
+          <a:p>
+            <a:pPr algn="ctr"/>
+            <a:r>
+              <a:rPr lang="es-PE" b="1" dirty="0">
+                <a:solidFill>
+                  <a:schemeClr val="lt1"/>
+                </a:solidFill>
+                <a:latin typeface="Calibri" panose="020F0502020204030204" pitchFamily="34" charset="0"/>
+                <a:ea typeface="Calibri" panose="020F0502020204030204" pitchFamily="34" charset="0"/>
+                <a:cs typeface="Calibri" panose="020F0502020204030204" pitchFamily="34" charset="0"/>
+              </a:rPr>
+              <a:t>{song1}</a:t>
+            </a:r>
+          </a:p>
+        </p:txBody>
+      </p:sp>
+      <p:sp>
+        <p:nvSpPr>
+          <p:cNvPr id="10" name="TextBox 9">
+            <a:extLst>
+              <a:ext uri="{FF2B5EF4-FFF2-40B4-BE49-F238E27FC236}">
+                <a16:creationId xmlns:a16="http://schemas.microsoft.com/office/drawing/2014/main" id="{2A2F8B33-8ECB-90AD-6AED-9340256A782C}"/>
+              </a:ext>
+            </a:extLst>
+          </p:cNvPr>
+          <p:cNvSpPr txBox="1"/>
+          <p:nvPr/>
+        </p:nvSpPr>
+        <p:spPr>
+          <a:xfrm>
+            <a:off x="2724147" y="2928652"/>
+            <a:ext cx="6743696" cy="369332"/>
+          </a:xfrm>
+          <a:prstGeom prst="rect">
+            <a:avLst/>
+          </a:prstGeom>
+          <a:noFill/>
+        </p:spPr>
+        <p:txBody>
+          <a:bodyPr wrap="square" rtlCol="0">
+            <a:spAutoFit/>
+          </a:bodyPr>
+          <a:lstStyle/>
+          <a:p>
+            <a:pPr algn="ctr"/>
+            <a:r>
+              <a:rPr lang="es-PE" b="1" dirty="0">
+                <a:solidFill>
+                  <a:schemeClr val="lt1"/>
+                </a:solidFill>
+                <a:latin typeface="Calibri" panose="020F0502020204030204" pitchFamily="34" charset="0"/>
+                <a:ea typeface="Calibri" panose="020F0502020204030204" pitchFamily="34" charset="0"/>
+                <a:cs typeface="Calibri" panose="020F0502020204030204" pitchFamily="34" charset="0"/>
+              </a:rPr>
+              <a:t>{song2}</a:t>
+            </a:r>
+          </a:p>
+        </p:txBody>
+      </p:sp>
+      <p:sp>
+        <p:nvSpPr>
+          <p:cNvPr id="17" name="TextBox 16">
+            <a:extLst>
+              <a:ext uri="{FF2B5EF4-FFF2-40B4-BE49-F238E27FC236}">
+                <a16:creationId xmlns:a16="http://schemas.microsoft.com/office/drawing/2014/main" id="{87C83D1E-65F9-66E2-C5B0-FFB83F28C58E}"/>
+              </a:ext>
+            </a:extLst>
+          </p:cNvPr>
+          <p:cNvSpPr txBox="1"/>
+          <p:nvPr/>
+        </p:nvSpPr>
+        <p:spPr>
+          <a:xfrm>
+            <a:off x="2724147" y="4125192"/>
+            <a:ext cx="6743696" cy="369332"/>
+          </a:xfrm>
+          <a:prstGeom prst="rect">
+            <a:avLst/>
+          </a:prstGeom>
+          <a:noFill/>
+        </p:spPr>
+        <p:txBody>
+          <a:bodyPr wrap="square" rtlCol="0">
+            <a:spAutoFit/>
+          </a:bodyPr>
+          <a:lstStyle/>
+          <a:p>
+            <a:pPr algn="ctr"/>
+            <a:r>
+              <a:rPr lang="es-PE" b="1" dirty="0">
+                <a:solidFill>
+                  <a:schemeClr val="lt1"/>
+                </a:solidFill>
+                <a:latin typeface="Calibri" panose="020F0502020204030204" pitchFamily="34" charset="0"/>
+                <a:ea typeface="Calibri" panose="020F0502020204030204" pitchFamily="34" charset="0"/>
+                <a:cs typeface="Calibri" panose="020F0502020204030204" pitchFamily="34" charset="0"/>
+              </a:rPr>
+              <a:t>{song3}</a:t>
+            </a:r>
+          </a:p>
+        </p:txBody>
+      </p:sp>
+      <p:sp>
+        <p:nvSpPr>
+          <p:cNvPr id="19" name="TextBox 18">
+            <a:extLst>
+              <a:ext uri="{FF2B5EF4-FFF2-40B4-BE49-F238E27FC236}">
+                <a16:creationId xmlns:a16="http://schemas.microsoft.com/office/drawing/2014/main" id="{E0C888BC-CF2E-F296-A158-718D89844C4E}"/>
+              </a:ext>
+            </a:extLst>
+          </p:cNvPr>
+          <p:cNvSpPr txBox="1"/>
+          <p:nvPr/>
+        </p:nvSpPr>
+        <p:spPr>
+          <a:xfrm>
+            <a:off x="2724147" y="5319932"/>
+            <a:ext cx="6743696" cy="369332"/>
+          </a:xfrm>
+          <a:prstGeom prst="rect">
+            <a:avLst/>
+          </a:prstGeom>
+          <a:noFill/>
+        </p:spPr>
+        <p:txBody>
+          <a:bodyPr wrap="square" rtlCol="0">
+            <a:spAutoFit/>
+          </a:bodyPr>
+          <a:lstStyle/>
+          <a:p>
+            <a:pPr algn="ctr"/>
+            <a:r>
+              <a:rPr lang="es-PE" b="1" dirty="0">
+                <a:solidFill>
+                  <a:schemeClr val="lt1"/>
+                </a:solidFill>
+                <a:latin typeface="Calibri" panose="020F0502020204030204" pitchFamily="34" charset="0"/>
+                <a:ea typeface="Calibri" panose="020F0502020204030204" pitchFamily="34" charset="0"/>
+                <a:cs typeface="Calibri" panose="020F0502020204030204" pitchFamily="34" charset="0"/>
+              </a:rPr>
+              <a:t>{song4}</a:t>
+            </a:r>
+          </a:p>
+        </p:txBody>
+      </p:sp>
     </p:spTree>
     <p:extLst>
       <p:ext uri="{BB962C8B-B14F-4D97-AF65-F5344CB8AC3E}">
@@ -12768,23 +13408,20 @@
               <a:tabLst/>
               <a:defRPr/>
             </a:pPr>
-            <a:r>
-              <a:rPr kumimoji="0" lang="es-PE" sz="2000" b="1" i="0" u="none" strike="noStrike" kern="1200" cap="none" spc="0" normalizeH="0" baseline="0" noProof="0" dirty="0">
-                <a:ln>
-                  <a:noFill/>
-                </a:ln>
-                <a:solidFill>
-                  <a:prstClr val="white"/>
-                </a:solidFill>
-                <a:effectLst/>
-                <a:uLnTx/>
-                <a:uFillTx/>
-                <a:latin typeface="Calibri" panose="020F0502020204030204"/>
-                <a:ea typeface="+mn-ea"/>
-                <a:cs typeface="+mn-cs"/>
-              </a:rPr>
-              <a:t>{song1}</a:t>
-            </a:r>
+            <a:endParaRPr kumimoji="0" lang="es-PE" sz="2000" b="1" i="0" u="none" strike="noStrike" kern="1200" cap="none" spc="0" normalizeH="0" baseline="0" noProof="0" dirty="0">
+              <a:ln>
+                <a:noFill/>
+              </a:ln>
+              <a:solidFill>
+                <a:prstClr val="white"/>
+              </a:solidFill>
+              <a:effectLst/>
+              <a:uLnTx/>
+              <a:uFillTx/>
+              <a:latin typeface="Calibri" panose="020F0502020204030204"/>
+              <a:ea typeface="+mn-ea"/>
+              <a:cs typeface="+mn-cs"/>
+            </a:endParaRPr>
           </a:p>
         </p:txBody>
       </p:sp>
@@ -13117,23 +13754,20 @@
               <a:tabLst/>
               <a:defRPr/>
             </a:pPr>
-            <a:r>
-              <a:rPr kumimoji="0" lang="es-PE" sz="2000" b="1" i="0" u="none" strike="noStrike" kern="1200" cap="none" spc="0" normalizeH="0" baseline="0" noProof="0" dirty="0">
-                <a:ln>
-                  <a:noFill/>
-                </a:ln>
-                <a:solidFill>
-                  <a:prstClr val="white"/>
-                </a:solidFill>
-                <a:effectLst/>
-                <a:uLnTx/>
-                <a:uFillTx/>
-                <a:latin typeface="Calibri" panose="020F0502020204030204"/>
-                <a:ea typeface="+mn-ea"/>
-                <a:cs typeface="+mn-cs"/>
-              </a:rPr>
-              <a:t>{song4}</a:t>
-            </a:r>
+            <a:endParaRPr kumimoji="0" lang="es-PE" sz="2000" b="1" i="0" u="none" strike="noStrike" kern="1200" cap="none" spc="0" normalizeH="0" baseline="0" noProof="0" dirty="0">
+              <a:ln>
+                <a:noFill/>
+              </a:ln>
+              <a:solidFill>
+                <a:prstClr val="white"/>
+              </a:solidFill>
+              <a:effectLst/>
+              <a:uLnTx/>
+              <a:uFillTx/>
+              <a:latin typeface="Calibri" panose="020F0502020204030204"/>
+              <a:ea typeface="+mn-ea"/>
+              <a:cs typeface="+mn-cs"/>
+            </a:endParaRPr>
           </a:p>
         </p:txBody>
       </p:sp>
@@ -13466,23 +14100,20 @@
               <a:tabLst/>
               <a:defRPr/>
             </a:pPr>
-            <a:r>
-              <a:rPr kumimoji="0" lang="es-PE" sz="2000" b="1" i="0" u="none" strike="noStrike" kern="1200" cap="none" spc="0" normalizeH="0" baseline="0" noProof="0" dirty="0">
-                <a:ln>
-                  <a:noFill/>
-                </a:ln>
-                <a:solidFill>
-                  <a:prstClr val="white"/>
-                </a:solidFill>
-                <a:effectLst/>
-                <a:uLnTx/>
-                <a:uFillTx/>
-                <a:latin typeface="Calibri" panose="020F0502020204030204"/>
-                <a:ea typeface="+mn-ea"/>
-                <a:cs typeface="+mn-cs"/>
-              </a:rPr>
-              <a:t>{song3}</a:t>
-            </a:r>
+            <a:endParaRPr kumimoji="0" lang="es-PE" sz="2000" b="1" i="0" u="none" strike="noStrike" kern="1200" cap="none" spc="0" normalizeH="0" baseline="0" noProof="0" dirty="0">
+              <a:ln>
+                <a:noFill/>
+              </a:ln>
+              <a:solidFill>
+                <a:prstClr val="white"/>
+              </a:solidFill>
+              <a:effectLst/>
+              <a:uLnTx/>
+              <a:uFillTx/>
+              <a:latin typeface="Calibri" panose="020F0502020204030204"/>
+              <a:ea typeface="+mn-ea"/>
+              <a:cs typeface="+mn-cs"/>
+            </a:endParaRPr>
           </a:p>
         </p:txBody>
       </p:sp>
@@ -13815,23 +14446,20 @@
               <a:tabLst/>
               <a:defRPr/>
             </a:pPr>
-            <a:r>
-              <a:rPr kumimoji="0" lang="es-PE" sz="2000" b="1" i="0" u="none" strike="noStrike" kern="1200" cap="none" spc="0" normalizeH="0" baseline="0" noProof="0" dirty="0">
-                <a:ln>
-                  <a:noFill/>
-                </a:ln>
-                <a:solidFill>
-                  <a:prstClr val="white"/>
-                </a:solidFill>
-                <a:effectLst/>
-                <a:uLnTx/>
-                <a:uFillTx/>
-                <a:latin typeface="Calibri" panose="020F0502020204030204"/>
-                <a:ea typeface="+mn-ea"/>
-                <a:cs typeface="+mn-cs"/>
-              </a:rPr>
-              <a:t>{song2}</a:t>
-            </a:r>
+            <a:endParaRPr kumimoji="0" lang="es-PE" sz="2000" b="1" i="0" u="none" strike="noStrike" kern="1200" cap="none" spc="0" normalizeH="0" baseline="0" noProof="0" dirty="0">
+              <a:ln>
+                <a:noFill/>
+              </a:ln>
+              <a:solidFill>
+                <a:prstClr val="white"/>
+              </a:solidFill>
+              <a:effectLst/>
+              <a:uLnTx/>
+              <a:uFillTx/>
+              <a:latin typeface="Calibri" panose="020F0502020204030204"/>
+              <a:ea typeface="+mn-ea"/>
+              <a:cs typeface="+mn-cs"/>
+            </a:endParaRPr>
           </a:p>
         </p:txBody>
       </p:sp>
@@ -14663,6 +15291,178 @@
                 <a:cs typeface="+mn-cs"/>
               </a:rPr>
               <a:t>{avatar}</a:t>
+            </a:r>
+          </a:p>
+        </p:txBody>
+      </p:sp>
+      <p:sp>
+        <p:nvSpPr>
+          <p:cNvPr id="6" name="TextBox 5">
+            <a:extLst>
+              <a:ext uri="{FF2B5EF4-FFF2-40B4-BE49-F238E27FC236}">
+                <a16:creationId xmlns:a16="http://schemas.microsoft.com/office/drawing/2014/main" id="{65F71908-A246-4451-0E57-1C47CFD3B6B2}"/>
+              </a:ext>
+            </a:extLst>
+          </p:cNvPr>
+          <p:cNvSpPr txBox="1"/>
+          <p:nvPr/>
+        </p:nvSpPr>
+        <p:spPr>
+          <a:xfrm>
+            <a:off x="2724150" y="1753004"/>
+            <a:ext cx="6743696" cy="369332"/>
+          </a:xfrm>
+          <a:prstGeom prst="rect">
+            <a:avLst/>
+          </a:prstGeom>
+          <a:noFill/>
+        </p:spPr>
+        <p:txBody>
+          <a:bodyPr wrap="square" rtlCol="0">
+            <a:spAutoFit/>
+          </a:bodyPr>
+          <a:lstStyle/>
+          <a:p>
+            <a:pPr algn="ctr"/>
+            <a:r>
+              <a:rPr lang="es-PE" b="1" dirty="0">
+                <a:solidFill>
+                  <a:schemeClr val="lt1"/>
+                </a:solidFill>
+                <a:latin typeface="Calibri" panose="020F0502020204030204" pitchFamily="34" charset="0"/>
+                <a:ea typeface="Calibri" panose="020F0502020204030204" pitchFamily="34" charset="0"/>
+                <a:cs typeface="Calibri" panose="020F0502020204030204" pitchFamily="34" charset="0"/>
+              </a:rPr>
+              <a:t>{song1}</a:t>
+            </a:r>
+          </a:p>
+        </p:txBody>
+      </p:sp>
+      <p:sp>
+        <p:nvSpPr>
+          <p:cNvPr id="10" name="TextBox 9">
+            <a:extLst>
+              <a:ext uri="{FF2B5EF4-FFF2-40B4-BE49-F238E27FC236}">
+                <a16:creationId xmlns:a16="http://schemas.microsoft.com/office/drawing/2014/main" id="{0853D787-F729-73DF-D81D-45C50BDC3DBF}"/>
+              </a:ext>
+            </a:extLst>
+          </p:cNvPr>
+          <p:cNvSpPr txBox="1"/>
+          <p:nvPr/>
+        </p:nvSpPr>
+        <p:spPr>
+          <a:xfrm>
+            <a:off x="2724147" y="2928652"/>
+            <a:ext cx="6743696" cy="369332"/>
+          </a:xfrm>
+          <a:prstGeom prst="rect">
+            <a:avLst/>
+          </a:prstGeom>
+          <a:noFill/>
+        </p:spPr>
+        <p:txBody>
+          <a:bodyPr wrap="square" rtlCol="0">
+            <a:spAutoFit/>
+          </a:bodyPr>
+          <a:lstStyle/>
+          <a:p>
+            <a:pPr algn="ctr"/>
+            <a:r>
+              <a:rPr lang="es-PE" b="1" dirty="0">
+                <a:solidFill>
+                  <a:schemeClr val="lt1"/>
+                </a:solidFill>
+                <a:latin typeface="Calibri" panose="020F0502020204030204" pitchFamily="34" charset="0"/>
+                <a:ea typeface="Calibri" panose="020F0502020204030204" pitchFamily="34" charset="0"/>
+                <a:cs typeface="Calibri" panose="020F0502020204030204" pitchFamily="34" charset="0"/>
+              </a:rPr>
+              <a:t>{song2}</a:t>
+            </a:r>
+          </a:p>
+        </p:txBody>
+      </p:sp>
+      <p:sp>
+        <p:nvSpPr>
+          <p:cNvPr id="17" name="TextBox 16">
+            <a:extLst>
+              <a:ext uri="{FF2B5EF4-FFF2-40B4-BE49-F238E27FC236}">
+                <a16:creationId xmlns:a16="http://schemas.microsoft.com/office/drawing/2014/main" id="{24FA3BDC-C9D5-35ED-1B84-354300F0FEF6}"/>
+              </a:ext>
+            </a:extLst>
+          </p:cNvPr>
+          <p:cNvSpPr txBox="1"/>
+          <p:nvPr/>
+        </p:nvSpPr>
+        <p:spPr>
+          <a:xfrm>
+            <a:off x="2724147" y="4125192"/>
+            <a:ext cx="6743696" cy="369332"/>
+          </a:xfrm>
+          <a:prstGeom prst="rect">
+            <a:avLst/>
+          </a:prstGeom>
+          <a:noFill/>
+        </p:spPr>
+        <p:txBody>
+          <a:bodyPr wrap="square" rtlCol="0">
+            <a:spAutoFit/>
+          </a:bodyPr>
+          <a:lstStyle/>
+          <a:p>
+            <a:pPr algn="ctr"/>
+            <a:r>
+              <a:rPr lang="es-PE" b="1" dirty="0">
+                <a:solidFill>
+                  <a:schemeClr val="lt1"/>
+                </a:solidFill>
+                <a:latin typeface="Calibri" panose="020F0502020204030204" pitchFamily="34" charset="0"/>
+                <a:ea typeface="Calibri" panose="020F0502020204030204" pitchFamily="34" charset="0"/>
+                <a:cs typeface="Calibri" panose="020F0502020204030204" pitchFamily="34" charset="0"/>
+              </a:rPr>
+              <a:t>{song3}</a:t>
+            </a:r>
+          </a:p>
+        </p:txBody>
+      </p:sp>
+      <p:sp>
+        <p:nvSpPr>
+          <p:cNvPr id="19" name="TextBox 18">
+            <a:extLst>
+              <a:ext uri="{FF2B5EF4-FFF2-40B4-BE49-F238E27FC236}">
+                <a16:creationId xmlns:a16="http://schemas.microsoft.com/office/drawing/2014/main" id="{EF28D3E7-B85C-DDAF-41FF-ED15B64D0FE6}"/>
+              </a:ext>
+            </a:extLst>
+          </p:cNvPr>
+          <p:cNvSpPr txBox="1"/>
+          <p:nvPr/>
+        </p:nvSpPr>
+        <p:spPr>
+          <a:xfrm>
+            <a:off x="2724147" y="5319932"/>
+            <a:ext cx="6743696" cy="369332"/>
+          </a:xfrm>
+          <a:prstGeom prst="rect">
+            <a:avLst/>
+          </a:prstGeom>
+          <a:noFill/>
+        </p:spPr>
+        <p:txBody>
+          <a:bodyPr wrap="square" rtlCol="0">
+            <a:spAutoFit/>
+          </a:bodyPr>
+          <a:lstStyle/>
+          <a:p>
+            <a:pPr algn="ctr"/>
+            <a:r>
+              <a:rPr lang="es-PE" b="1" dirty="0">
+                <a:solidFill>
+                  <a:schemeClr val="lt1"/>
+                </a:solidFill>
+                <a:latin typeface="Calibri" panose="020F0502020204030204" pitchFamily="34" charset="0"/>
+                <a:ea typeface="Calibri" panose="020F0502020204030204" pitchFamily="34" charset="0"/>
+                <a:cs typeface="Calibri" panose="020F0502020204030204" pitchFamily="34" charset="0"/>
+              </a:rPr>
+              <a:t>{song4}</a:t>
             </a:r>
           </a:p>
         </p:txBody>
